--- a/lessons/10-1/slides.pptx
+++ b/lessons/10-1/slides.pptx
@@ -11023,7 +11023,7 @@
       </p:sp>
       <p:sp>
         <p:nvSpPr>
-          <p:cNvPr id="20" name="Shape 18"/>
+          <p:cNvPr id="20" name="Text 18"/>
           <p:cNvSpPr/>
           <p:nvPr/>
         </p:nvSpPr>
@@ -11044,33 +11044,7 @@
             <a:solidFill>
               <a:srgbClr val="D6DBDF"/>
             </a:solidFill>
-            <a:prstDash val="solid"/>
           </a:ln>
-          <a:effectLst>
-            <a:outerShdw sx="100000" sy="100000" kx="0" ky="0" algn="bl" rotWithShape="0" blurRad="50800" dist="12700" dir="5400000">
-              <a:srgbClr val="1C2E42">
-                <a:alpha val="10000"/>
-              </a:srgbClr>
-            </a:outerShdw>
-          </a:effectLst>
-        </p:spPr>
-      </p:sp>
-      <p:sp>
-        <p:nvSpPr>
-          <p:cNvPr id="21" name="Text 19"/>
-          <p:cNvSpPr/>
-          <p:nvPr/>
-        </p:nvSpPr>
-        <p:spPr>
-          <a:xfrm>
-            <a:off x="685800" y="1481328"/>
-            <a:ext cx="1447800" cy="384048"/>
-          </a:xfrm>
-          <a:prstGeom prst="rect">
-            <a:avLst/>
-          </a:prstGeom>
-          <a:noFill/>
-          <a:ln/>
         </p:spPr>
         <p:txBody>
           <a:bodyPr wrap="square" rtlCol="0" anchor="ctr"/>
@@ -11080,7 +11054,7 @@
               <a:buNone/>
             </a:pPr>
             <a:r>
-              <a:rPr lang="en-US" sz="900" dirty="0">
+              <a:rPr lang="en-US" sz="900" b="1" dirty="0">
                 <a:solidFill>
                   <a:srgbClr val="17324D"/>
                 </a:solidFill>
@@ -11096,7 +11070,7 @@
       </p:sp>
       <p:sp>
         <p:nvSpPr>
-          <p:cNvPr id="22" name="Shape 20"/>
+          <p:cNvPr id="21" name="Text 19"/>
           <p:cNvSpPr/>
           <p:nvPr/>
         </p:nvSpPr>
@@ -11117,33 +11091,7 @@
             <a:solidFill>
               <a:srgbClr val="D6DBDF"/>
             </a:solidFill>
-            <a:prstDash val="solid"/>
           </a:ln>
-          <a:effectLst>
-            <a:outerShdw sx="100000" sy="100000" kx="0" ky="0" algn="bl" rotWithShape="0" blurRad="50800" dist="12700" dir="5400000">
-              <a:srgbClr val="1C2E42">
-                <a:alpha val="10000"/>
-              </a:srgbClr>
-            </a:outerShdw>
-          </a:effectLst>
-        </p:spPr>
-      </p:sp>
-      <p:sp>
-        <p:nvSpPr>
-          <p:cNvPr id="23" name="Text 21"/>
-          <p:cNvSpPr/>
-          <p:nvPr/>
-        </p:nvSpPr>
-        <p:spPr>
-          <a:xfrm>
-            <a:off x="2453640" y="1481328"/>
-            <a:ext cx="1447800" cy="384048"/>
-          </a:xfrm>
-          <a:prstGeom prst="rect">
-            <a:avLst/>
-          </a:prstGeom>
-          <a:noFill/>
-          <a:ln/>
         </p:spPr>
         <p:txBody>
           <a:bodyPr wrap="square" rtlCol="0" anchor="ctr"/>
@@ -11153,7 +11101,7 @@
               <a:buNone/>
             </a:pPr>
             <a:r>
-              <a:rPr lang="en-US" sz="900" dirty="0">
+              <a:rPr lang="en-US" sz="900" b="1" dirty="0">
                 <a:solidFill>
                   <a:srgbClr val="17324D"/>
                 </a:solidFill>
@@ -11169,7 +11117,7 @@
       </p:sp>
       <p:sp>
         <p:nvSpPr>
-          <p:cNvPr id="24" name="Shape 22"/>
+          <p:cNvPr id="22" name="Text 20"/>
           <p:cNvSpPr/>
           <p:nvPr/>
         </p:nvSpPr>
@@ -11190,33 +11138,7 @@
             <a:solidFill>
               <a:srgbClr val="D6DBDF"/>
             </a:solidFill>
-            <a:prstDash val="solid"/>
           </a:ln>
-          <a:effectLst>
-            <a:outerShdw sx="100000" sy="100000" kx="0" ky="0" algn="bl" rotWithShape="0" blurRad="50800" dist="12700" dir="5400000">
-              <a:srgbClr val="1C2E42">
-                <a:alpha val="10000"/>
-              </a:srgbClr>
-            </a:outerShdw>
-          </a:effectLst>
-        </p:spPr>
-      </p:sp>
-      <p:sp>
-        <p:nvSpPr>
-          <p:cNvPr id="25" name="Text 23"/>
-          <p:cNvSpPr/>
-          <p:nvPr/>
-        </p:nvSpPr>
-        <p:spPr>
-          <a:xfrm>
-            <a:off x="4221480" y="1481328"/>
-            <a:ext cx="1447800" cy="384048"/>
-          </a:xfrm>
-          <a:prstGeom prst="rect">
-            <a:avLst/>
-          </a:prstGeom>
-          <a:noFill/>
-          <a:ln/>
         </p:spPr>
         <p:txBody>
           <a:bodyPr wrap="square" rtlCol="0" anchor="ctr"/>
@@ -11226,7 +11148,7 @@
               <a:buNone/>
             </a:pPr>
             <a:r>
-              <a:rPr lang="en-US" sz="900" dirty="0">
+              <a:rPr lang="en-US" sz="900" b="1" dirty="0">
                 <a:solidFill>
                   <a:srgbClr val="17324D"/>
                 </a:solidFill>
@@ -11242,7 +11164,7 @@
       </p:sp>
       <p:sp>
         <p:nvSpPr>
-          <p:cNvPr id="26" name="Shape 24"/>
+          <p:cNvPr id="23" name="Text 21"/>
           <p:cNvSpPr/>
           <p:nvPr/>
         </p:nvSpPr>
@@ -11263,33 +11185,7 @@
             <a:solidFill>
               <a:srgbClr val="D6DBDF"/>
             </a:solidFill>
-            <a:prstDash val="solid"/>
           </a:ln>
-          <a:effectLst>
-            <a:outerShdw sx="100000" sy="100000" kx="0" ky="0" algn="bl" rotWithShape="0" blurRad="50800" dist="12700" dir="5400000">
-              <a:srgbClr val="1C2E42">
-                <a:alpha val="10000"/>
-              </a:srgbClr>
-            </a:outerShdw>
-          </a:effectLst>
-        </p:spPr>
-      </p:sp>
-      <p:sp>
-        <p:nvSpPr>
-          <p:cNvPr id="27" name="Text 25"/>
-          <p:cNvSpPr/>
-          <p:nvPr/>
-        </p:nvSpPr>
-        <p:spPr>
-          <a:xfrm>
-            <a:off x="685800" y="1975104"/>
-            <a:ext cx="1447800" cy="384048"/>
-          </a:xfrm>
-          <a:prstGeom prst="rect">
-            <a:avLst/>
-          </a:prstGeom>
-          <a:noFill/>
-          <a:ln/>
         </p:spPr>
         <p:txBody>
           <a:bodyPr wrap="square" rtlCol="0" anchor="ctr"/>
@@ -11299,7 +11195,7 @@
               <a:buNone/>
             </a:pPr>
             <a:r>
-              <a:rPr lang="en-US" sz="900" dirty="0">
+              <a:rPr lang="en-US" sz="900" b="1" dirty="0">
                 <a:solidFill>
                   <a:srgbClr val="17324D"/>
                 </a:solidFill>
@@ -11315,7 +11211,7 @@
       </p:sp>
       <p:sp>
         <p:nvSpPr>
-          <p:cNvPr id="28" name="Shape 26"/>
+          <p:cNvPr id="24" name="Shape 22"/>
           <p:cNvSpPr/>
           <p:nvPr/>
         </p:nvSpPr>
@@ -11349,7 +11245,7 @@
       </p:sp>
       <p:sp>
         <p:nvSpPr>
-          <p:cNvPr id="29" name="Text 27"/>
+          <p:cNvPr id="25" name="Text 23"/>
           <p:cNvSpPr/>
           <p:nvPr/>
         </p:nvSpPr>
@@ -11390,7 +11286,7 @@
       </p:sp>
       <p:sp>
         <p:nvSpPr>
-          <p:cNvPr id="30" name="Shape 28"/>
+          <p:cNvPr id="26" name="Shape 24"/>
           <p:cNvSpPr/>
           <p:nvPr/>
         </p:nvSpPr>
@@ -11424,7 +11320,7 @@
       </p:sp>
       <p:sp>
         <p:nvSpPr>
-          <p:cNvPr id="31" name="Text 29"/>
+          <p:cNvPr id="27" name="Text 25"/>
           <p:cNvSpPr/>
           <p:nvPr/>
         </p:nvSpPr>
@@ -11465,7 +11361,7 @@
       </p:sp>
       <p:sp>
         <p:nvSpPr>
-          <p:cNvPr id="32" name="Shape 30"/>
+          <p:cNvPr id="28" name="Shape 26"/>
           <p:cNvSpPr/>
           <p:nvPr/>
         </p:nvSpPr>
@@ -11499,7 +11395,7 @@
       </p:sp>
       <p:sp>
         <p:nvSpPr>
-          <p:cNvPr id="33" name="Text 31"/>
+          <p:cNvPr id="29" name="Text 27"/>
           <p:cNvSpPr/>
           <p:nvPr/>
         </p:nvSpPr>
@@ -11540,7 +11436,7 @@
       </p:sp>
       <p:sp>
         <p:nvSpPr>
-          <p:cNvPr id="34" name="Text 32"/>
+          <p:cNvPr id="30" name="Text 28"/>
           <p:cNvSpPr/>
           <p:nvPr/>
         </p:nvSpPr>
@@ -11579,7 +11475,7 @@
       </p:sp>
       <p:sp>
         <p:nvSpPr>
-          <p:cNvPr id="35" name="Shape 33"/>
+          <p:cNvPr id="31" name="Shape 29"/>
           <p:cNvSpPr/>
           <p:nvPr/>
         </p:nvSpPr>
@@ -11602,7 +11498,7 @@
       </p:sp>
       <p:sp>
         <p:nvSpPr>
-          <p:cNvPr id="36" name="Shape 34"/>
+          <p:cNvPr id="32" name="Shape 30"/>
           <p:cNvSpPr/>
           <p:nvPr/>
         </p:nvSpPr>
@@ -11625,7 +11521,7 @@
       </p:sp>
       <p:sp>
         <p:nvSpPr>
-          <p:cNvPr id="37" name="Shape 35"/>
+          <p:cNvPr id="33" name="Shape 31"/>
           <p:cNvSpPr/>
           <p:nvPr/>
         </p:nvSpPr>
@@ -11648,7 +11544,7 @@
       </p:sp>
       <p:sp>
         <p:nvSpPr>
-          <p:cNvPr id="38" name="Shape 36"/>
+          <p:cNvPr id="34" name="Shape 32"/>
           <p:cNvSpPr/>
           <p:nvPr/>
         </p:nvSpPr>
@@ -11671,7 +11567,7 @@
       </p:sp>
       <p:sp>
         <p:nvSpPr>
-          <p:cNvPr id="39" name="Shape 37"/>
+          <p:cNvPr id="35" name="Shape 33"/>
           <p:cNvSpPr/>
           <p:nvPr/>
         </p:nvSpPr>

--- a/lessons/10-1/slides.pptx
+++ b/lessons/10-1/slides.pptx
@@ -2584,7 +2584,7 @@
                 <a:ea typeface="Outfit" pitchFamily="34" charset="-122"/>
                 <a:cs typeface="Outfit" pitchFamily="34" charset="-120"/>
               </a:rPr>
-              <a:t>6.G.2</a:t>
+              <a:t>6.GR.2</a:t>
             </a:r>
             <a:endParaRPr lang="en-US" sz="1000" dirty="0"/>
           </a:p>
@@ -3307,7 +3307,7 @@
                 <a:ea typeface="Outfit" pitchFamily="34" charset="-122"/>
                 <a:cs typeface="Outfit" pitchFamily="34" charset="-120"/>
               </a:rPr>
-              <a:t>6.G.2</a:t>
+              <a:t>6.GR.2</a:t>
             </a:r>
             <a:endParaRPr lang="en-US" sz="900" dirty="0"/>
           </a:p>
@@ -4534,7 +4534,7 @@
                 <a:ea typeface="Outfit" pitchFamily="34" charset="-122"/>
                 <a:cs typeface="Outfit" pitchFamily="34" charset="-120"/>
               </a:rPr>
-              <a:t>6.G.2</a:t>
+              <a:t>6.GR.2</a:t>
             </a:r>
             <a:endParaRPr lang="en-US" sz="900" dirty="0"/>
           </a:p>
@@ -5644,7 +5644,7 @@
                 <a:ea typeface="Outfit" pitchFamily="34" charset="-122"/>
                 <a:cs typeface="Outfit" pitchFamily="34" charset="-120"/>
               </a:rPr>
-              <a:t>6.G.2</a:t>
+              <a:t>6.GR.2</a:t>
             </a:r>
             <a:endParaRPr lang="en-US" sz="900" dirty="0"/>
           </a:p>
@@ -6980,7 +6980,7 @@
                 <a:ea typeface="Outfit" pitchFamily="34" charset="-122"/>
                 <a:cs typeface="Outfit" pitchFamily="34" charset="-120"/>
               </a:rPr>
-              <a:t>6.G.2</a:t>
+              <a:t>6.GR.2</a:t>
             </a:r>
             <a:endParaRPr lang="en-US" sz="900" dirty="0"/>
           </a:p>
@@ -8274,7 +8274,7 @@
                 <a:ea typeface="Outfit" pitchFamily="34" charset="-122"/>
                 <a:cs typeface="Outfit" pitchFamily="34" charset="-120"/>
               </a:rPr>
-              <a:t>6.G.2</a:t>
+              <a:t>6.GR.2</a:t>
             </a:r>
             <a:endParaRPr lang="en-US" sz="900" dirty="0"/>
           </a:p>
@@ -9336,7 +9336,7 @@
                 <a:ea typeface="Outfit" pitchFamily="34" charset="-122"/>
                 <a:cs typeface="Outfit" pitchFamily="34" charset="-120"/>
               </a:rPr>
-              <a:t>6.G.2</a:t>
+              <a:t>6.GR.2</a:t>
             </a:r>
             <a:endParaRPr lang="en-US" sz="900" dirty="0"/>
           </a:p>
@@ -9800,7 +9800,7 @@
                 <a:ea typeface="Hanken Grotesk" pitchFamily="34" charset="-122"/>
                 <a:cs typeface="Hanken Grotesk" pitchFamily="34" charset="-120"/>
               </a:rPr>
-              <a:t>What is the volume of a rectangular prism with l = 7 in, w = 3 in, h = 4 in?</a:t>
+              <a:t>A rectangular prism has length 8 cm, width 5 cm, and height 4 cm. What is its volume?</a:t>
             </a:r>
             <a:endParaRPr lang="en-US" sz="1050" dirty="0"/>
           </a:p>
@@ -9876,7 +9876,7 @@
                 <a:ea typeface="Hanken Grotesk" pitchFamily="34" charset="-122"/>
                 <a:cs typeface="Hanken Grotesk" pitchFamily="34" charset="-120"/>
               </a:rPr>
-              <a:t>A time capsule box has a volume of 120 cm³. Its length is 10 cm and width is 4 cm. What is its height?</a:t>
+              <a:t>A box has a volume of 72 in³. Its base is 6 in by 4 in. What is its height?</a:t>
             </a:r>
             <a:endParaRPr lang="en-US" sz="1050" dirty="0"/>
           </a:p>
@@ -10301,7 +10301,7 @@
                 <a:ea typeface="Outfit" pitchFamily="34" charset="-122"/>
                 <a:cs typeface="Outfit" pitchFamily="34" charset="-120"/>
               </a:rPr>
-              <a:t>6.G.2</a:t>
+              <a:t>6.GR.2</a:t>
             </a:r>
             <a:endParaRPr lang="en-US" sz="900" dirty="0"/>
           </a:p>
@@ -11218,7 +11218,7 @@
                 <a:ea typeface="Outfit" pitchFamily="34" charset="-122"/>
                 <a:cs typeface="Outfit" pitchFamily="34" charset="-120"/>
               </a:rPr>
-              <a:t>6.G.2</a:t>
+              <a:t>6.GR.2</a:t>
             </a:r>
             <a:endParaRPr lang="en-US" sz="900" dirty="0"/>
           </a:p>
@@ -12346,7 +12346,7 @@
                 <a:ea typeface="Outfit" pitchFamily="34" charset="-122"/>
                 <a:cs typeface="Outfit" pitchFamily="34" charset="-120"/>
               </a:rPr>
-              <a:t>6.G.2</a:t>
+              <a:t>6.GR.2</a:t>
             </a:r>
             <a:endParaRPr lang="en-US" sz="900" dirty="0"/>
           </a:p>
@@ -13779,7 +13779,7 @@
                 <a:ea typeface="Outfit" pitchFamily="34" charset="-122"/>
                 <a:cs typeface="Outfit" pitchFamily="34" charset="-120"/>
               </a:rPr>
-              <a:t>6.G.2</a:t>
+              <a:t>6.GR.2</a:t>
             </a:r>
             <a:endParaRPr lang="en-US" sz="900" dirty="0"/>
           </a:p>
@@ -14593,7 +14593,7 @@
                 <a:ea typeface="Outfit" pitchFamily="34" charset="-122"/>
                 <a:cs typeface="Outfit" pitchFamily="34" charset="-120"/>
               </a:rPr>
-              <a:t>6.G.2</a:t>
+              <a:t>6.GR.2</a:t>
             </a:r>
             <a:endParaRPr lang="en-US" sz="900" dirty="0"/>
           </a:p>
@@ -15700,7 +15700,7 @@
                 <a:ea typeface="Outfit" pitchFamily="34" charset="-122"/>
                 <a:cs typeface="Outfit" pitchFamily="34" charset="-120"/>
               </a:rPr>
-              <a:t>6.G.2</a:t>
+              <a:t>6.GR.2</a:t>
             </a:r>
             <a:endParaRPr lang="en-US" sz="900" dirty="0"/>
           </a:p>
@@ -16854,7 +16854,7 @@
                 <a:ea typeface="Outfit" pitchFamily="34" charset="-122"/>
                 <a:cs typeface="Outfit" pitchFamily="34" charset="-120"/>
               </a:rPr>
-              <a:t>6.G.2</a:t>
+              <a:t>6.GR.2</a:t>
             </a:r>
             <a:endParaRPr lang="en-US" sz="900" dirty="0"/>
           </a:p>
@@ -18008,7 +18008,7 @@
                 <a:ea typeface="Outfit" pitchFamily="34" charset="-122"/>
                 <a:cs typeface="Outfit" pitchFamily="34" charset="-120"/>
               </a:rPr>
-              <a:t>6.G.2</a:t>
+              <a:t>6.GR.2</a:t>
             </a:r>
             <a:endParaRPr lang="en-US" sz="900" dirty="0"/>
           </a:p>
@@ -19115,7 +19115,7 @@
                 <a:ea typeface="Outfit" pitchFamily="34" charset="-122"/>
                 <a:cs typeface="Outfit" pitchFamily="34" charset="-120"/>
               </a:rPr>
-              <a:t>6.G.2</a:t>
+              <a:t>6.GR.2</a:t>
             </a:r>
             <a:endParaRPr lang="en-US" sz="900" dirty="0"/>
           </a:p>
@@ -20175,7 +20175,7 @@
                 <a:ea typeface="Outfit" pitchFamily="34" charset="-122"/>
                 <a:cs typeface="Outfit" pitchFamily="34" charset="-120"/>
               </a:rPr>
-              <a:t>6.G.2</a:t>
+              <a:t>6.GR.2</a:t>
             </a:r>
             <a:endParaRPr lang="en-US" sz="900" dirty="0"/>
           </a:p>
@@ -21163,7 +21163,7 @@
                 <a:ea typeface="Outfit" pitchFamily="34" charset="-122"/>
                 <a:cs typeface="Outfit" pitchFamily="34" charset="-120"/>
               </a:rPr>
-              <a:t>6.G.2</a:t>
+              <a:t>6.GR.2</a:t>
             </a:r>
             <a:endParaRPr lang="en-US" sz="900" dirty="0"/>
           </a:p>
